--- a/public/fun/pack/pptx/reviewpro/보장점검양식프리미엄_43_가족점검_크림슨골드.pptx
+++ b/public/fun/pack/pptx/reviewpro/보장점검양식프리미엄_43_가족점검_크림슨골드.pptx
@@ -112,12 +112,12 @@
   <p:extLst>
     <p:ext uri="{521415D9-36F7-43E2-AB2F-B90AF26B5E84}">
       <p14:sectionLst xmlns:p14="http://schemas.microsoft.com/office/powerpoint/2010/main">
-        <p14:section name="시작" id="{0265C7E8-B33A-4933-B460-73A9F3505FB9}">
+        <p14:section name="시작" id="{D4C7FB90-02BF-4DF9-864F-515B7C90A5A1}">
           <p14:sldIdLst>
             <p14:sldId id="256"/>
           </p14:sldIdLst>
         </p14:section>
-        <p14:section name="본문" id="{B57A4518-1D6A-4BF2-ADF9-07A581DB030A}">
+        <p14:section name="본문" id="{448F4A6B-6E66-4892-ABE4-89A8A5A9B0C6}">
           <p14:sldIdLst>
             <p14:sldId id="257"/>
             <p14:sldId id="258"/>
@@ -1950,7 +1950,7 @@
             </a:lvl1pPr>
           </a:lstStyle>
           <a:p>
-            <a:fld id="{635ED701-F5EE-4355-926E-CF5F0BDDAF73}" type="slidenum">
+            <a:fld id="{919DCE47-75E1-4E2F-81B9-2FFCF7FBEBED}" type="slidenum">
               <a:rPr lang="en-US"/>
               <a:t>‹#›</a:t>
             </a:fld>
@@ -3075,7 +3075,7 @@
             </a:lvl1pPr>
           </a:lstStyle>
           <a:p>
-            <a:fld id="{17BE85CD-7921-46E8-8917-4ADC6B5DEA85}" type="slidenum">
+            <a:fld id="{BB9071E3-F3E1-4C02-8FD0-D8ACEF3FE472}" type="slidenum">
               <a:rPr lang="en-US"/>
               <a:t>‹#›</a:t>
             </a:fld>
@@ -3824,7 +3824,7 @@
             </a:lvl1pPr>
           </a:lstStyle>
           <a:p>
-            <a:fld id="{7BEF1F58-28C3-40EC-A786-1272AFEDB01D}" type="slidenum">
+            <a:fld id="{CDBF768C-76C1-4666-83B3-25F4E77E01A3}" type="slidenum">
               <a:rPr lang="en-US"/>
               <a:t>‹#›</a:t>
             </a:fld>
@@ -4687,7 +4687,7 @@
           <a:p>
             <a:r>
               <a:rPr lang="ko-KR"/>
-              <a:t>겨울방학에 한 번 정리합니다</a:t>
+              <a:t>시간 날 때 한 번 정리합니다</a:t>
             </a:r>
           </a:p>
         </p:txBody>
@@ -4709,7 +4709,7 @@
           <a:p>
             <a:r>
               <a:rPr lang="ko-KR"/>
-              <a:t>가족 점검 · 0000. 00. 00</a:t>
+              <a:t>가족 점검 · 날짜 입력</a:t>
             </a:r>
           </a:p>
           <a:p>
@@ -4822,7 +4822,7 @@
           <a:bodyPr/>
           <a:lstStyle/>
           <a:p>
-            <a:fld id="{5679AB1E-FADE-49DA-B1ED-3D665B7AF0AB}" type="slidenum">
+            <a:fld id="{1D1FAAED-586B-4086-A389-DE2472BD9408}" type="slidenum">
               <a:rPr lang="en-US"/>
               <a:t>‹#›</a:t>
             </a:fld>
@@ -5754,7 +5754,7 @@
           <a:bodyPr/>
           <a:lstStyle/>
           <a:p>
-            <a:fld id="{0F3DB041-13A0-4629-891A-C59F5FE08CB7}" type="slidenum">
+            <a:fld id="{4E1AA096-615A-43CD-AD18-5BF07B27B952}" type="slidenum">
               <a:rPr lang="en-US"/>
               <a:t>‹#›</a:t>
             </a:fld>
@@ -7282,7 +7282,7 @@
           <a:bodyPr/>
           <a:lstStyle/>
           <a:p>
-            <a:fld id="{CF4FA4B6-9244-4980-844A-1EF1E2DFE73E}" type="slidenum">
+            <a:fld id="{8B17E9CB-BC4D-462F-AFC1-27985D6EC034}" type="slidenum">
               <a:rPr lang="en-US"/>
               <a:t>‹#›</a:t>
             </a:fld>
@@ -8854,7 +8854,7 @@
           <a:bodyPr/>
           <a:lstStyle/>
           <a:p>
-            <a:fld id="{92F20969-AEAC-4B75-87F7-F7C0A36B34A7}" type="slidenum">
+            <a:fld id="{023171DC-8B7C-48D7-89CE-9EF7477DB1F2}" type="slidenum">
               <a:rPr lang="en-US"/>
               <a:t>‹#›</a:t>
             </a:fld>
@@ -9756,7 +9756,7 @@
           <a:bodyPr/>
           <a:lstStyle/>
           <a:p>
-            <a:fld id="{6B40E8C9-C63C-4E4B-9803-79373C5DB739}" type="slidenum">
+            <a:fld id="{8945022C-45EC-44C1-B3FE-A3BC32352B6C}" type="slidenum">
               <a:rPr lang="en-US"/>
               <a:t>‹#›</a:t>
             </a:fld>
